--- a/markdown/files/slides/lecture26_p_np.pptx
+++ b/markdown/files/slides/lecture26_p_np.pptx
@@ -12476,8 +12476,8 @@
           </a:p>
         </p:txBody>
       </p:sp>
-      <mc:AlternateContent xmlns:mc="http://schemas.openxmlformats.org/markup-compatibility/2006" xmlns:a14="http://schemas.microsoft.com/office/drawing/2010/main">
-        <mc:Choice Requires="a14">
+      <mc:AlternateContent xmlns:mc="http://schemas.openxmlformats.org/markup-compatibility/2006">
+        <mc:Choice xmlns:a14="http://schemas.microsoft.com/office/drawing/2010/main" Requires="a14">
           <p:sp>
             <p:nvSpPr>
               <p:cNvPr id="3" name="Content Placeholder 2">
@@ -12702,7 +12702,7 @@
                       <a:rPr lang="en-US" b="0" i="1" smtClean="0">
                         <a:latin typeface="Cambria Math" panose="02040503050406030204" pitchFamily="18" charset="0"/>
                       </a:rPr>
-                      <m:t>𝐸</m:t>
+                      <m:t>𝑉</m:t>
                     </m:r>
                   </m:oMath>
                 </a14:m>
@@ -12743,7 +12743,7 @@
             </p:txBody>
           </p:sp>
         </mc:Choice>
-        <mc:Fallback xmlns="">
+        <mc:Fallback>
           <p:sp>
             <p:nvSpPr>
               <p:cNvPr id="3" name="Content Placeholder 2">
@@ -12890,8 +12890,8 @@
             </a:p>
           </p:txBody>
         </p:sp>
-        <mc:AlternateContent xmlns:mc="http://schemas.openxmlformats.org/markup-compatibility/2006">
-          <mc:Choice xmlns:a14="http://schemas.microsoft.com/office/drawing/2010/main" Requires="a14">
+        <mc:AlternateContent xmlns:mc="http://schemas.openxmlformats.org/markup-compatibility/2006" xmlns:a14="http://schemas.microsoft.com/office/drawing/2010/main">
+          <mc:Choice Requires="a14">
             <p:sp>
               <p:nvSpPr>
                 <p:cNvPr id="7" name="TextBox 6">
@@ -13047,7 +13047,7 @@
               </p:txBody>
             </p:sp>
           </mc:Choice>
-          <mc:Fallback>
+          <mc:Fallback xmlns="">
             <p:sp>
               <p:nvSpPr>
                 <p:cNvPr id="7" name="TextBox 6">
@@ -13149,8 +13149,8 @@
             </a:p>
           </p:txBody>
         </p:sp>
-        <mc:AlternateContent xmlns:mc="http://schemas.openxmlformats.org/markup-compatibility/2006">
-          <mc:Choice xmlns:a14="http://schemas.microsoft.com/office/drawing/2010/main" Requires="a14">
+        <mc:AlternateContent xmlns:mc="http://schemas.openxmlformats.org/markup-compatibility/2006" xmlns:a14="http://schemas.microsoft.com/office/drawing/2010/main">
+          <mc:Choice Requires="a14">
             <p:sp>
               <p:nvSpPr>
                 <p:cNvPr id="4" name="Oval 3">
@@ -13292,7 +13292,7 @@
               </p:txBody>
             </p:sp>
           </mc:Choice>
-          <mc:Fallback>
+          <mc:Fallback xmlns="">
             <p:sp>
               <p:nvSpPr>
                 <p:cNvPr id="4" name="Oval 3">
@@ -13338,8 +13338,8 @@
             </p:sp>
           </mc:Fallback>
         </mc:AlternateContent>
-        <mc:AlternateContent xmlns:mc="http://schemas.openxmlformats.org/markup-compatibility/2006">
-          <mc:Choice xmlns:a14="http://schemas.microsoft.com/office/drawing/2010/main" Requires="a14">
+        <mc:AlternateContent xmlns:mc="http://schemas.openxmlformats.org/markup-compatibility/2006" xmlns:a14="http://schemas.microsoft.com/office/drawing/2010/main">
+          <mc:Choice Requires="a14">
             <p:sp>
               <p:nvSpPr>
                 <p:cNvPr id="11" name="TextBox 10">
@@ -13460,7 +13460,7 @@
               </p:txBody>
             </p:sp>
           </mc:Choice>
-          <mc:Fallback>
+          <mc:Fallback xmlns="">
             <p:sp>
               <p:nvSpPr>
                 <p:cNvPr id="11" name="TextBox 10">
@@ -13895,8 +13895,8 @@
           </p:txBody>
         </p:sp>
       </p:grpSp>
-      <mc:AlternateContent xmlns:mc="http://schemas.openxmlformats.org/markup-compatibility/2006">
-        <mc:Choice xmlns:a14="http://schemas.microsoft.com/office/drawing/2010/main" Requires="a14">
+      <mc:AlternateContent xmlns:mc="http://schemas.openxmlformats.org/markup-compatibility/2006" xmlns:a14="http://schemas.microsoft.com/office/drawing/2010/main">
+        <mc:Choice Requires="a14">
           <p:sp>
             <p:nvSpPr>
               <p:cNvPr id="26" name="Title 1">
@@ -13965,7 +13965,7 @@
             </p:txBody>
           </p:sp>
         </mc:Choice>
-        <mc:Fallback>
+        <mc:Fallback xmlns="">
           <p:sp>
             <p:nvSpPr>
               <p:cNvPr id="26" name="Title 1">
@@ -20515,8 +20515,8 @@
             </a:p>
           </p:txBody>
         </p:sp>
-        <mc:AlternateContent xmlns:mc="http://schemas.openxmlformats.org/markup-compatibility/2006">
-          <mc:Choice xmlns:a14="http://schemas.microsoft.com/office/drawing/2010/main" Requires="a14">
+        <mc:AlternateContent xmlns:mc="http://schemas.openxmlformats.org/markup-compatibility/2006" xmlns:a14="http://schemas.microsoft.com/office/drawing/2010/main">
+          <mc:Choice Requires="a14">
             <p:sp>
               <p:nvSpPr>
                 <p:cNvPr id="6" name="TextBox 5">
@@ -20571,7 +20571,7 @@
               </p:txBody>
             </p:sp>
           </mc:Choice>
-          <mc:Fallback>
+          <mc:Fallback xmlns="">
             <p:sp>
               <p:nvSpPr>
                 <p:cNvPr id="6" name="TextBox 5">
@@ -21702,8 +21702,8 @@
             <a:chExt cx="3471362" cy="1519744"/>
           </a:xfrm>
         </p:grpSpPr>
-        <mc:AlternateContent xmlns:mc="http://schemas.openxmlformats.org/markup-compatibility/2006">
-          <mc:Choice xmlns:a14="http://schemas.microsoft.com/office/drawing/2010/main" Requires="a14">
+        <mc:AlternateContent xmlns:mc="http://schemas.openxmlformats.org/markup-compatibility/2006" xmlns:a14="http://schemas.microsoft.com/office/drawing/2010/main">
+          <mc:Choice Requires="a14">
             <p:sp>
               <p:nvSpPr>
                 <p:cNvPr id="30" name="AutoShape 5"/>
@@ -21870,7 +21870,7 @@
               </p:txBody>
             </p:sp>
           </mc:Choice>
-          <mc:Fallback>
+          <mc:Fallback xmlns="">
             <p:sp>
               <p:nvSpPr>
                 <p:cNvPr id="30" name="AutoShape 5"/>
@@ -23100,8 +23100,8 @@
             </a:p>
           </p:txBody>
         </p:sp>
-        <mc:AlternateContent xmlns:mc="http://schemas.openxmlformats.org/markup-compatibility/2006">
-          <mc:Choice xmlns:a14="http://schemas.microsoft.com/office/drawing/2010/main" Requires="a14">
+        <mc:AlternateContent xmlns:mc="http://schemas.openxmlformats.org/markup-compatibility/2006" xmlns:a14="http://schemas.microsoft.com/office/drawing/2010/main">
+          <mc:Choice Requires="a14">
             <p:sp>
               <p:nvSpPr>
                 <p:cNvPr id="186" name="TextBox 185">
@@ -23156,7 +23156,7 @@
               </p:txBody>
             </p:sp>
           </mc:Choice>
-          <mc:Fallback>
+          <mc:Fallback xmlns="">
             <p:sp>
               <p:nvSpPr>
                 <p:cNvPr id="186" name="TextBox 185">
@@ -27482,8 +27482,8 @@
             </a:p>
           </p:txBody>
         </p:sp>
-        <mc:AlternateContent xmlns:mc="http://schemas.openxmlformats.org/markup-compatibility/2006">
-          <mc:Choice xmlns:a14="http://schemas.microsoft.com/office/drawing/2010/main" Requires="a14">
+        <mc:AlternateContent xmlns:mc="http://schemas.openxmlformats.org/markup-compatibility/2006" xmlns:a14="http://schemas.microsoft.com/office/drawing/2010/main">
+          <mc:Choice Requires="a14">
             <p:sp>
               <p:nvSpPr>
                 <p:cNvPr id="22" name="Flowchart: Magnetic Disk 21"/>
@@ -27558,7 +27558,7 @@
               </p:txBody>
             </p:sp>
           </mc:Choice>
-          <mc:Fallback>
+          <mc:Fallback xmlns="">
             <p:sp>
               <p:nvSpPr>
                 <p:cNvPr id="22" name="Flowchart: Magnetic Disk 21"/>
@@ -27723,8 +27723,8 @@
             </a:p>
           </p:txBody>
         </p:sp>
-        <mc:AlternateContent xmlns:mc="http://schemas.openxmlformats.org/markup-compatibility/2006">
-          <mc:Choice xmlns:a14="http://schemas.microsoft.com/office/drawing/2010/main" Requires="a14">
+        <mc:AlternateContent xmlns:mc="http://schemas.openxmlformats.org/markup-compatibility/2006" xmlns:a14="http://schemas.microsoft.com/office/drawing/2010/main">
+          <mc:Choice Requires="a14">
             <p:sp>
               <p:nvSpPr>
                 <p:cNvPr id="23" name="Rectangle 22"/>
@@ -27799,7 +27799,7 @@
               </p:txBody>
             </p:sp>
           </mc:Choice>
-          <mc:Fallback>
+          <mc:Fallback xmlns="">
             <p:sp>
               <p:nvSpPr>
                 <p:cNvPr id="23" name="Rectangle 22"/>
@@ -27993,8 +27993,8 @@
             </a:p>
           </p:txBody>
         </p:sp>
-        <mc:AlternateContent xmlns:mc="http://schemas.openxmlformats.org/markup-compatibility/2006">
-          <mc:Choice xmlns:a14="http://schemas.microsoft.com/office/drawing/2010/main" Requires="a14">
+        <mc:AlternateContent xmlns:mc="http://schemas.openxmlformats.org/markup-compatibility/2006" xmlns:a14="http://schemas.microsoft.com/office/drawing/2010/main">
+          <mc:Choice Requires="a14">
             <p:sp>
               <p:nvSpPr>
                 <p:cNvPr id="28" name="TextBox 27"/>
@@ -28036,7 +28036,7 @@
               </p:txBody>
             </p:sp>
           </mc:Choice>
-          <mc:Fallback>
+          <mc:Fallback xmlns="">
             <p:sp>
               <p:nvSpPr>
                 <p:cNvPr id="28" name="TextBox 27"/>
@@ -28585,8 +28585,8 @@
             <a:chExt cx="2333596" cy="1346628"/>
           </a:xfrm>
         </p:grpSpPr>
-        <mc:AlternateContent xmlns:mc="http://schemas.openxmlformats.org/markup-compatibility/2006">
-          <mc:Choice xmlns:a14="http://schemas.microsoft.com/office/drawing/2010/main" Requires="a14">
+        <mc:AlternateContent xmlns:mc="http://schemas.openxmlformats.org/markup-compatibility/2006" xmlns:a14="http://schemas.microsoft.com/office/drawing/2010/main">
+          <mc:Choice Requires="a14">
             <p:sp>
               <p:nvSpPr>
                 <p:cNvPr id="21" name="TextBox 20"/>
@@ -28628,7 +28628,7 @@
               </p:txBody>
             </p:sp>
           </mc:Choice>
-          <mc:Fallback>
+          <mc:Fallback xmlns="">
             <p:sp>
               <p:nvSpPr>
                 <p:cNvPr id="21" name="TextBox 20"/>
@@ -33154,8 +33154,8 @@
               </a:p>
             </p:txBody>
           </p:sp>
-          <mc:AlternateContent xmlns:mc="http://schemas.openxmlformats.org/markup-compatibility/2006">
-            <mc:Choice xmlns:a14="http://schemas.microsoft.com/office/drawing/2010/main" Requires="a14">
+          <mc:AlternateContent xmlns:mc="http://schemas.openxmlformats.org/markup-compatibility/2006" xmlns:a14="http://schemas.microsoft.com/office/drawing/2010/main">
+            <mc:Choice Requires="a14">
               <p:sp>
                 <p:nvSpPr>
                   <p:cNvPr id="22" name="Flowchart: Magnetic Disk 21"/>
@@ -33230,7 +33230,7 @@
                 </p:txBody>
               </p:sp>
             </mc:Choice>
-            <mc:Fallback>
+            <mc:Fallback xmlns="">
               <p:sp>
                 <p:nvSpPr>
                   <p:cNvPr id="22" name="Flowchart: Magnetic Disk 21"/>
@@ -33327,8 +33327,8 @@
               </a:p>
             </p:txBody>
           </p:sp>
-          <mc:AlternateContent xmlns:mc="http://schemas.openxmlformats.org/markup-compatibility/2006">
-            <mc:Choice xmlns:a14="http://schemas.microsoft.com/office/drawing/2010/main" Requires="a14">
+          <mc:AlternateContent xmlns:mc="http://schemas.openxmlformats.org/markup-compatibility/2006" xmlns:a14="http://schemas.microsoft.com/office/drawing/2010/main">
+            <mc:Choice Requires="a14">
               <p:sp>
                 <p:nvSpPr>
                   <p:cNvPr id="23" name="Rectangle 22"/>
@@ -33403,7 +33403,7 @@
                 </p:txBody>
               </p:sp>
             </mc:Choice>
-            <mc:Fallback>
+            <mc:Fallback xmlns="">
               <p:sp>
                 <p:nvSpPr>
                   <p:cNvPr id="23" name="Rectangle 22"/>
@@ -33530,8 +33530,8 @@
               <a:chExt cx="1500667" cy="1374220"/>
             </a:xfrm>
           </p:grpSpPr>
-          <mc:AlternateContent xmlns:mc="http://schemas.openxmlformats.org/markup-compatibility/2006">
-            <mc:Choice xmlns:a14="http://schemas.microsoft.com/office/drawing/2010/main" Requires="a14">
+          <mc:AlternateContent xmlns:mc="http://schemas.openxmlformats.org/markup-compatibility/2006" xmlns:a14="http://schemas.microsoft.com/office/drawing/2010/main">
+            <mc:Choice Requires="a14">
               <p:sp>
                 <p:nvSpPr>
                   <p:cNvPr id="21" name="TextBox 20"/>
@@ -33573,7 +33573,7 @@
                 </p:txBody>
               </p:sp>
             </mc:Choice>
-            <mc:Fallback>
+            <mc:Fallback xmlns="">
               <p:sp>
                 <p:nvSpPr>
                   <p:cNvPr id="21" name="TextBox 20"/>
@@ -33612,8 +33612,8 @@
               </p:sp>
             </mc:Fallback>
           </mc:AlternateContent>
-          <mc:AlternateContent xmlns:mc="http://schemas.openxmlformats.org/markup-compatibility/2006">
-            <mc:Choice xmlns:a14="http://schemas.microsoft.com/office/drawing/2010/main" Requires="a14">
+          <mc:AlternateContent xmlns:mc="http://schemas.openxmlformats.org/markup-compatibility/2006" xmlns:a14="http://schemas.microsoft.com/office/drawing/2010/main">
+            <mc:Choice Requires="a14">
               <p:sp>
                 <p:nvSpPr>
                   <p:cNvPr id="279" name="Rectangle 278"/>
@@ -33688,7 +33688,7 @@
                 </p:txBody>
               </p:sp>
             </mc:Choice>
-            <mc:Fallback>
+            <mc:Fallback xmlns="">
               <p:sp>
                 <p:nvSpPr>
                   <p:cNvPr id="279" name="Rectangle 278"/>
@@ -33756,8 +33756,8 @@
               <a:chExt cx="1486241" cy="1596667"/>
             </a:xfrm>
           </p:grpSpPr>
-          <mc:AlternateContent xmlns:mc="http://schemas.openxmlformats.org/markup-compatibility/2006">
-            <mc:Choice xmlns:a14="http://schemas.microsoft.com/office/drawing/2010/main" Requires="a14">
+          <mc:AlternateContent xmlns:mc="http://schemas.openxmlformats.org/markup-compatibility/2006" xmlns:a14="http://schemas.microsoft.com/office/drawing/2010/main">
+            <mc:Choice Requires="a14">
               <p:sp>
                 <p:nvSpPr>
                   <p:cNvPr id="28" name="TextBox 27"/>
@@ -33799,7 +33799,7 @@
                 </p:txBody>
               </p:sp>
             </mc:Choice>
-            <mc:Fallback>
+            <mc:Fallback xmlns="">
               <p:sp>
                 <p:nvSpPr>
                   <p:cNvPr id="28" name="TextBox 27"/>
@@ -33838,8 +33838,8 @@
               </p:sp>
             </mc:Fallback>
           </mc:AlternateContent>
-          <mc:AlternateContent xmlns:mc="http://schemas.openxmlformats.org/markup-compatibility/2006">
-            <mc:Choice xmlns:a14="http://schemas.microsoft.com/office/drawing/2010/main" Requires="a14">
+          <mc:AlternateContent xmlns:mc="http://schemas.openxmlformats.org/markup-compatibility/2006" xmlns:a14="http://schemas.microsoft.com/office/drawing/2010/main">
+            <mc:Choice Requires="a14">
               <p:sp>
                 <p:nvSpPr>
                   <p:cNvPr id="280" name="Flowchart: Magnetic Disk 279"/>
@@ -33914,7 +33914,7 @@
                 </p:txBody>
               </p:sp>
             </mc:Choice>
-            <mc:Fallback>
+            <mc:Fallback xmlns="">
               <p:sp>
                 <p:nvSpPr>
                   <p:cNvPr id="280" name="Flowchart: Magnetic Disk 279"/>
@@ -34177,8 +34177,8 @@
               </a:p>
             </p:txBody>
           </p:sp>
-          <mc:AlternateContent xmlns:mc="http://schemas.openxmlformats.org/markup-compatibility/2006">
-            <mc:Choice xmlns:a14="http://schemas.microsoft.com/office/drawing/2010/main" Requires="a14">
+          <mc:AlternateContent xmlns:mc="http://schemas.openxmlformats.org/markup-compatibility/2006" xmlns:a14="http://schemas.microsoft.com/office/drawing/2010/main">
+            <mc:Choice Requires="a14">
               <p:sp>
                 <p:nvSpPr>
                   <p:cNvPr id="20" name="TextBox 19"/>
@@ -34281,7 +34281,7 @@
                 </p:txBody>
               </p:sp>
             </mc:Choice>
-            <mc:Fallback>
+            <mc:Fallback xmlns="">
               <p:sp>
                 <p:nvSpPr>
                   <p:cNvPr id="20" name="TextBox 19"/>
@@ -34942,8 +34942,8 @@
             </a:p>
           </p:txBody>
         </p:sp>
-        <mc:AlternateContent xmlns:mc="http://schemas.openxmlformats.org/markup-compatibility/2006">
-          <mc:Choice xmlns:a14="http://schemas.microsoft.com/office/drawing/2010/main" Requires="a14">
+        <mc:AlternateContent xmlns:mc="http://schemas.openxmlformats.org/markup-compatibility/2006" xmlns:a14="http://schemas.microsoft.com/office/drawing/2010/main">
+          <mc:Choice Requires="a14">
             <p:sp>
               <p:nvSpPr>
                 <p:cNvPr id="21" name="TextBox 20"/>
@@ -34985,7 +34985,7 @@
               </p:txBody>
             </p:sp>
           </mc:Choice>
-          <mc:Fallback>
+          <mc:Fallback xmlns="">
             <p:sp>
               <p:nvSpPr>
                 <p:cNvPr id="21" name="TextBox 20"/>
@@ -35024,8 +35024,8 @@
             </p:sp>
           </mc:Fallback>
         </mc:AlternateContent>
-        <mc:AlternateContent xmlns:mc="http://schemas.openxmlformats.org/markup-compatibility/2006">
-          <mc:Choice xmlns:a14="http://schemas.microsoft.com/office/drawing/2010/main" Requires="a14">
+        <mc:AlternateContent xmlns:mc="http://schemas.openxmlformats.org/markup-compatibility/2006" xmlns:a14="http://schemas.microsoft.com/office/drawing/2010/main">
+          <mc:Choice Requires="a14">
             <p:sp>
               <p:nvSpPr>
                 <p:cNvPr id="22" name="Flowchart: Magnetic Disk 21"/>
@@ -35100,7 +35100,7 @@
               </p:txBody>
             </p:sp>
           </mc:Choice>
-          <mc:Fallback>
+          <mc:Fallback xmlns="">
             <p:sp>
               <p:nvSpPr>
                 <p:cNvPr id="22" name="Flowchart: Magnetic Disk 21"/>
@@ -35147,8 +35147,8 @@
             </p:sp>
           </mc:Fallback>
         </mc:AlternateContent>
-        <mc:AlternateContent xmlns:mc="http://schemas.openxmlformats.org/markup-compatibility/2006">
-          <mc:Choice xmlns:a14="http://schemas.microsoft.com/office/drawing/2010/main" Requires="a14">
+        <mc:AlternateContent xmlns:mc="http://schemas.openxmlformats.org/markup-compatibility/2006" xmlns:a14="http://schemas.microsoft.com/office/drawing/2010/main">
+          <mc:Choice Requires="a14">
             <p:sp>
               <p:nvSpPr>
                 <p:cNvPr id="23" name="Rectangle 22"/>
@@ -35223,7 +35223,7 @@
               </p:txBody>
             </p:sp>
           </mc:Choice>
-          <mc:Fallback>
+          <mc:Fallback xmlns="">
             <p:sp>
               <p:nvSpPr>
                 <p:cNvPr id="23" name="Rectangle 22"/>
@@ -35270,8 +35270,8 @@
             </p:sp>
           </mc:Fallback>
         </mc:AlternateContent>
-        <mc:AlternateContent xmlns:mc="http://schemas.openxmlformats.org/markup-compatibility/2006">
-          <mc:Choice xmlns:a14="http://schemas.microsoft.com/office/drawing/2010/main" Requires="a14">
+        <mc:AlternateContent xmlns:mc="http://schemas.openxmlformats.org/markup-compatibility/2006" xmlns:a14="http://schemas.microsoft.com/office/drawing/2010/main">
+          <mc:Choice Requires="a14">
             <p:sp>
               <p:nvSpPr>
                 <p:cNvPr id="28" name="TextBox 27"/>
@@ -35313,7 +35313,7 @@
               </p:txBody>
             </p:sp>
           </mc:Choice>
-          <mc:Fallback>
+          <mc:Fallback xmlns="">
             <p:sp>
               <p:nvSpPr>
                 <p:cNvPr id="28" name="TextBox 27"/>
@@ -35558,8 +35558,8 @@
             </a:p>
           </p:txBody>
         </p:sp>
-        <mc:AlternateContent xmlns:mc="http://schemas.openxmlformats.org/markup-compatibility/2006">
-          <mc:Choice xmlns:a14="http://schemas.microsoft.com/office/drawing/2010/main" Requires="a14">
+        <mc:AlternateContent xmlns:mc="http://schemas.openxmlformats.org/markup-compatibility/2006" xmlns:a14="http://schemas.microsoft.com/office/drawing/2010/main">
+          <mc:Choice Requires="a14">
             <p:sp>
               <p:nvSpPr>
                 <p:cNvPr id="279" name="Rectangle 278"/>
@@ -35634,7 +35634,7 @@
               </p:txBody>
             </p:sp>
           </mc:Choice>
-          <mc:Fallback>
+          <mc:Fallback xmlns="">
             <p:sp>
               <p:nvSpPr>
                 <p:cNvPr id="279" name="Rectangle 278"/>
@@ -35681,8 +35681,8 @@
             </p:sp>
           </mc:Fallback>
         </mc:AlternateContent>
-        <mc:AlternateContent xmlns:mc="http://schemas.openxmlformats.org/markup-compatibility/2006">
-          <mc:Choice xmlns:a14="http://schemas.microsoft.com/office/drawing/2010/main" Requires="a14">
+        <mc:AlternateContent xmlns:mc="http://schemas.openxmlformats.org/markup-compatibility/2006" xmlns:a14="http://schemas.microsoft.com/office/drawing/2010/main">
+          <mc:Choice Requires="a14">
             <p:sp>
               <p:nvSpPr>
                 <p:cNvPr id="280" name="Flowchart: Magnetic Disk 279"/>
@@ -35757,7 +35757,7 @@
               </p:txBody>
             </p:sp>
           </mc:Choice>
-          <mc:Fallback>
+          <mc:Fallback xmlns="">
             <p:sp>
               <p:nvSpPr>
                 <p:cNvPr id="280" name="Flowchart: Magnetic Disk 279"/>
@@ -35804,8 +35804,8 @@
             </p:sp>
           </mc:Fallback>
         </mc:AlternateContent>
-        <mc:AlternateContent xmlns:mc="http://schemas.openxmlformats.org/markup-compatibility/2006">
-          <mc:Choice xmlns:a14="http://schemas.microsoft.com/office/drawing/2010/main" Requires="a14">
+        <mc:AlternateContent xmlns:mc="http://schemas.openxmlformats.org/markup-compatibility/2006" xmlns:a14="http://schemas.microsoft.com/office/drawing/2010/main">
+          <mc:Choice Requires="a14">
             <p:sp>
               <p:nvSpPr>
                 <p:cNvPr id="20" name="TextBox 19"/>
@@ -35908,7 +35908,7 @@
               </p:txBody>
             </p:sp>
           </mc:Choice>
-          <mc:Fallback>
+          <mc:Fallback xmlns="">
             <p:sp>
               <p:nvSpPr>
                 <p:cNvPr id="20" name="TextBox 19"/>
@@ -37957,8 +37957,8 @@
               </a:p>
             </p:txBody>
           </p:sp>
-          <mc:AlternateContent xmlns:mc="http://schemas.openxmlformats.org/markup-compatibility/2006">
-            <mc:Choice xmlns:a14="http://schemas.microsoft.com/office/drawing/2010/main" Requires="a14">
+          <mc:AlternateContent xmlns:mc="http://schemas.openxmlformats.org/markup-compatibility/2006" xmlns:a14="http://schemas.microsoft.com/office/drawing/2010/main">
+            <mc:Choice Requires="a14">
               <p:sp>
                 <p:nvSpPr>
                   <p:cNvPr id="21" name="TextBox 20"/>
@@ -38000,7 +38000,7 @@
                 </p:txBody>
               </p:sp>
             </mc:Choice>
-            <mc:Fallback>
+            <mc:Fallback xmlns="">
               <p:sp>
                 <p:nvSpPr>
                   <p:cNvPr id="21" name="TextBox 20"/>
@@ -38039,8 +38039,8 @@
               </p:sp>
             </mc:Fallback>
           </mc:AlternateContent>
-          <mc:AlternateContent xmlns:mc="http://schemas.openxmlformats.org/markup-compatibility/2006">
-            <mc:Choice xmlns:a14="http://schemas.microsoft.com/office/drawing/2010/main" Requires="a14">
+          <mc:AlternateContent xmlns:mc="http://schemas.openxmlformats.org/markup-compatibility/2006" xmlns:a14="http://schemas.microsoft.com/office/drawing/2010/main">
+            <mc:Choice Requires="a14">
               <p:sp>
                 <p:nvSpPr>
                   <p:cNvPr id="22" name="Flowchart: Magnetic Disk 21"/>
@@ -38115,7 +38115,7 @@
                 </p:txBody>
               </p:sp>
             </mc:Choice>
-            <mc:Fallback>
+            <mc:Fallback xmlns="">
               <p:sp>
                 <p:nvSpPr>
                   <p:cNvPr id="22" name="Flowchart: Magnetic Disk 21"/>
@@ -38162,8 +38162,8 @@
               </p:sp>
             </mc:Fallback>
           </mc:AlternateContent>
-          <mc:AlternateContent xmlns:mc="http://schemas.openxmlformats.org/markup-compatibility/2006">
-            <mc:Choice xmlns:a14="http://schemas.microsoft.com/office/drawing/2010/main" Requires="a14">
+          <mc:AlternateContent xmlns:mc="http://schemas.openxmlformats.org/markup-compatibility/2006" xmlns:a14="http://schemas.microsoft.com/office/drawing/2010/main">
+            <mc:Choice Requires="a14">
               <p:sp>
                 <p:nvSpPr>
                   <p:cNvPr id="23" name="Rectangle 22"/>
@@ -38238,7 +38238,7 @@
                 </p:txBody>
               </p:sp>
             </mc:Choice>
-            <mc:Fallback>
+            <mc:Fallback xmlns="">
               <p:sp>
                 <p:nvSpPr>
                   <p:cNvPr id="23" name="Rectangle 22"/>
@@ -38285,8 +38285,8 @@
               </p:sp>
             </mc:Fallback>
           </mc:AlternateContent>
-          <mc:AlternateContent xmlns:mc="http://schemas.openxmlformats.org/markup-compatibility/2006">
-            <mc:Choice xmlns:a14="http://schemas.microsoft.com/office/drawing/2010/main" Requires="a14">
+          <mc:AlternateContent xmlns:mc="http://schemas.openxmlformats.org/markup-compatibility/2006" xmlns:a14="http://schemas.microsoft.com/office/drawing/2010/main">
+            <mc:Choice Requires="a14">
               <p:sp>
                 <p:nvSpPr>
                   <p:cNvPr id="28" name="TextBox 27"/>
@@ -38328,7 +38328,7 @@
                 </p:txBody>
               </p:sp>
             </mc:Choice>
-            <mc:Fallback>
+            <mc:Fallback xmlns="">
               <p:sp>
                 <p:nvSpPr>
                   <p:cNvPr id="28" name="TextBox 27"/>
@@ -38573,8 +38573,8 @@
               </a:p>
             </p:txBody>
           </p:sp>
-          <mc:AlternateContent xmlns:mc="http://schemas.openxmlformats.org/markup-compatibility/2006">
-            <mc:Choice xmlns:a14="http://schemas.microsoft.com/office/drawing/2010/main" Requires="a14">
+          <mc:AlternateContent xmlns:mc="http://schemas.openxmlformats.org/markup-compatibility/2006" xmlns:a14="http://schemas.microsoft.com/office/drawing/2010/main">
+            <mc:Choice Requires="a14">
               <p:sp>
                 <p:nvSpPr>
                   <p:cNvPr id="279" name="Rectangle 278"/>
@@ -38649,7 +38649,7 @@
                 </p:txBody>
               </p:sp>
             </mc:Choice>
-            <mc:Fallback>
+            <mc:Fallback xmlns="">
               <p:sp>
                 <p:nvSpPr>
                   <p:cNvPr id="279" name="Rectangle 278"/>
@@ -38696,8 +38696,8 @@
               </p:sp>
             </mc:Fallback>
           </mc:AlternateContent>
-          <mc:AlternateContent xmlns:mc="http://schemas.openxmlformats.org/markup-compatibility/2006">
-            <mc:Choice xmlns:a14="http://schemas.microsoft.com/office/drawing/2010/main" Requires="a14">
+          <mc:AlternateContent xmlns:mc="http://schemas.openxmlformats.org/markup-compatibility/2006" xmlns:a14="http://schemas.microsoft.com/office/drawing/2010/main">
+            <mc:Choice Requires="a14">
               <p:sp>
                 <p:nvSpPr>
                   <p:cNvPr id="280" name="Flowchart: Magnetic Disk 279"/>
@@ -38772,7 +38772,7 @@
                 </p:txBody>
               </p:sp>
             </mc:Choice>
-            <mc:Fallback>
+            <mc:Fallback xmlns="">
               <p:sp>
                 <p:nvSpPr>
                   <p:cNvPr id="280" name="Flowchart: Magnetic Disk 279"/>
@@ -38819,8 +38819,8 @@
               </p:sp>
             </mc:Fallback>
           </mc:AlternateContent>
-          <mc:AlternateContent xmlns:mc="http://schemas.openxmlformats.org/markup-compatibility/2006">
-            <mc:Choice xmlns:a14="http://schemas.microsoft.com/office/drawing/2010/main" Requires="a14">
+          <mc:AlternateContent xmlns:mc="http://schemas.openxmlformats.org/markup-compatibility/2006" xmlns:a14="http://schemas.microsoft.com/office/drawing/2010/main">
+            <mc:Choice Requires="a14">
               <p:sp>
                 <p:nvSpPr>
                   <p:cNvPr id="20" name="TextBox 19"/>
@@ -38923,7 +38923,7 @@
                 </p:txBody>
               </p:sp>
             </mc:Choice>
-            <mc:Fallback>
+            <mc:Fallback xmlns="">
               <p:sp>
                 <p:nvSpPr>
                   <p:cNvPr id="20" name="TextBox 19"/>
@@ -42311,8 +42311,8 @@
           <a:chExt cx="0" cy="0"/>
         </a:xfrm>
       </p:grpSpPr>
-      <mc:AlternateContent xmlns:mc="http://schemas.openxmlformats.org/markup-compatibility/2006">
-        <mc:Choice xmlns:a14="http://schemas.microsoft.com/office/drawing/2010/main" Requires="a14">
+      <mc:AlternateContent xmlns:mc="http://schemas.openxmlformats.org/markup-compatibility/2006" xmlns:a14="http://schemas.microsoft.com/office/drawing/2010/main">
+        <mc:Choice Requires="a14">
           <p:sp>
             <p:nvSpPr>
               <p:cNvPr id="2" name="Title 1">
@@ -42368,7 +42368,7 @@
             </p:txBody>
           </p:sp>
         </mc:Choice>
-        <mc:Fallback>
+        <mc:Fallback xmlns="">
           <p:sp>
             <p:nvSpPr>
               <p:cNvPr id="2" name="Title 1">
